--- a/assets/pptx/catalog-541.pptx
+++ b/assets/pptx/catalog-541.pptx
@@ -3268,7 +3268,7 @@
                 <a:ea typeface="Ebrima"/>
                 <a:cs typeface="Ebrima"/>
               </a:rPr>
-              <a:t>ከአይምሮ በላይ ነው ጌታ የአንተ ሥራ (2x)</a:t>
+              <a:t>ከአይምሮ በላይ ነው ጌታ የአንተ ሥራ 2x</a:t>
             </a:r>
           </a:p>
         </p:txBody>
@@ -3595,7 +3595,7 @@
                 <a:ea typeface="Ebrima"/>
                 <a:cs typeface="Ebrima"/>
               </a:rPr>
-              <a:t>ማለዳ ማለዳ ምህረት ያጠግበኛል (2x)</a:t>
+              <a:t>ማለዳ ማለዳ ምህረት ያጠግበኛል 2x</a:t>
             </a:r>
           </a:p>
         </p:txBody>
@@ -3783,7 +3783,7 @@
                 <a:ea typeface="Ebrima"/>
                 <a:cs typeface="Ebrima"/>
               </a:rPr>
-              <a:t>ከአይምሮ በላይ ነው ጌታ የአንተ ሥራ (2x)</a:t>
+              <a:t>ከአይምሮ በላይ ነው ጌታ የአንተ ሥራ 2x</a:t>
             </a:r>
           </a:p>
         </p:txBody>
@@ -4110,7 +4110,7 @@
                 <a:ea typeface="Ebrima"/>
                 <a:cs typeface="Ebrima"/>
               </a:rPr>
-              <a:t>ማለዳ ማለዳ ምህረት ያጠግበኛል (2x)</a:t>
+              <a:t>ማለዳ ማለዳ ምህረት ያጠግበኛል 2x</a:t>
             </a:r>
           </a:p>
         </p:txBody>
